--- a/curso/pptx/S58.pptx
+++ b/curso/pptx/S58.pptx
@@ -5233,7 +5233,7 @@
                 </a:solidFill>
                 <a:latin typeface="Nunito Sans"/>
               </a:rPr>
-              <a:t>Darle la razón en todo</a:t>
+              <a:t>对方说什么都同意</a:t>
             </a:r>
           </a:p>
           <a:p>
@@ -5258,7 +5258,7 @@
                 </a:solidFill>
                 <a:latin typeface="Nunito Sans"/>
               </a:rPr>
-              <a:t>Dejar de criticar</a:t>
+              <a:t>不再批评</a:t>
             </a:r>
           </a:p>
           <a:p>
@@ -5283,7 +5283,7 @@
                 </a:solidFill>
                 <a:latin typeface="Nunito Sans"/>
               </a:rPr>
-              <a:t>Hacerse el simpático</a:t>
+              <a:t>装作很友好</a:t>
             </a:r>
           </a:p>
         </p:txBody>
@@ -5413,7 +5413,7 @@
                 </a:solidFill>
                 <a:latin typeface="Nunito Sans"/>
               </a:rPr>
-              <a:t>Entender bien antes de responder</a:t>
+              <a:t>回应之前先好好理解</a:t>
             </a:r>
           </a:p>
           <a:p>
@@ -5438,7 +5438,7 @@
                 </a:solidFill>
                 <a:latin typeface="Nunito Sans"/>
               </a:rPr>
-              <a:t>Criticar la mejor versión de la idea</a:t>
+              <a:t>批评这个想法最好的说法</a:t>
             </a:r>
           </a:p>
           <a:p>
@@ -5463,7 +5463,7 @@
                 </a:solidFill>
                 <a:latin typeface="Nunito Sans"/>
               </a:rPr>
-              <a:t>Tratar al otro como alguien que razona</a:t>
+              <a:t>把对方当作一个讲道理的人</a:t>
             </a:r>
           </a:p>
         </p:txBody>
@@ -7257,7 +7257,7 @@
                 </a:solidFill>
                 <a:latin typeface="Nunito Sans"/>
               </a:rPr>
-              <a:t>Aquí «caridad» significa generosidad al interpretar</a:t>
+              <a:t>这里的“善意”是指在解释时要宽容大度</a:t>
             </a:r>
           </a:p>
           <a:p>
@@ -7282,7 +7282,7 @@
                 </a:solidFill>
                 <a:latin typeface="Nunito Sans"/>
               </a:rPr>
-              <a:t>Es lo contrario del hombre de paja （第15课）</a:t>
+              <a:t>它和稻草人（第15课）正相反</a:t>
             </a:r>
           </a:p>
           <a:p>
@@ -7307,7 +7307,7 @@
                 </a:solidFill>
                 <a:latin typeface="Nunito Sans"/>
               </a:rPr>
-              <a:t>No es darle la razón: es entenderle bien</a:t>
+              <a:t>这不是认同对方：而是好好地理解他</a:t>
             </a:r>
           </a:p>
         </p:txBody>
@@ -7862,7 +7862,7 @@
                 </a:solidFill>
                 <a:latin typeface="Nunito Sans"/>
               </a:rPr>
-              <a:t>1. Repite</a:t>
+              <a:t>1. 重述</a:t>
             </a:r>
             <a:r>
               <a:rPr sz="2800" b="0">
@@ -7871,7 +7871,7 @@
                 </a:solidFill>
                 <a:latin typeface="Nunito Sans"/>
               </a:rPr>
-              <a:t> la idea con tus palabras: «¿Quieres decir que…?»</a:t>
+              <a:t>这个想法，用你自己的话：“你是想说……吗？”</a:t>
             </a:r>
           </a:p>
           <a:p>
@@ -7896,7 +7896,7 @@
                 </a:solidFill>
                 <a:latin typeface="Nunito Sans"/>
               </a:rPr>
-              <a:t>2. Busca</a:t>
+              <a:t>2. 寻找</a:t>
             </a:r>
             <a:r>
               <a:rPr sz="2800" b="0">
@@ -7905,7 +7905,7 @@
                 </a:solidFill>
                 <a:latin typeface="Nunito Sans"/>
               </a:rPr>
-              <a:t> su mejor razón: ¿por qué lo piensa?</a:t>
+              <a:t>他最好的理由：他为什么这样想？</a:t>
             </a:r>
           </a:p>
           <a:p>
@@ -7930,7 +7930,7 @@
                 </a:solidFill>
                 <a:latin typeface="Nunito Sans"/>
               </a:rPr>
-              <a:t>3. Critica</a:t>
+              <a:t>3. 然后批评</a:t>
             </a:r>
             <a:r>
               <a:rPr sz="2800" b="0">
@@ -7939,7 +7939,7 @@
                 </a:solidFill>
                 <a:latin typeface="Nunito Sans"/>
               </a:rPr>
-              <a:t> después, si sigues sin estar de acuerdo.</a:t>
+              <a:t>，如果你仍然不同意。</a:t>
             </a:r>
           </a:p>
         </p:txBody>

--- a/curso/pptx/S58.pptx
+++ b/curso/pptx/S58.pptx
@@ -4047,7 +4047,7 @@
                 </a:solidFill>
                 <a:latin typeface="Fredoka"/>
               </a:rPr>
-              <a:t>案例1 · 娜亚拉和手机</a:t>
+              <a:t>案例1 · 一个女孩和手机</a:t>
             </a:r>
           </a:p>
         </p:txBody>
@@ -4129,7 +4129,7 @@
                 </a:solidFill>
                 <a:latin typeface="Nunito Sans"/>
               </a:rPr>
-              <a:t>娜亚拉：“教室里应该禁止手机。”艾托尔：“也就是说，你想回到石器时代。”</a:t>
+              <a:t>一个女孩：“教室里应该禁止手机。”一个男孩：“也就是说，你想回到石器时代。”</a:t>
             </a:r>
           </a:p>
         </p:txBody>
@@ -4177,7 +4177,7 @@
                 </a:solidFill>
                 <a:latin typeface="Nunito Sans"/>
               </a:rPr>
-              <a:t>艾托尔歪曲了这个想法：没有人说过“回到石器时代”。</a:t>
+              <a:t>这个男孩歪曲了这个想法：没有人说过“回到石器时代”。</a:t>
             </a:r>
           </a:p>
           <a:p>
@@ -4747,7 +4747,7 @@
                 </a:solidFill>
                 <a:latin typeface="Nunito Sans"/>
               </a:rPr>
-              <a:t>伊克尔写道：“所有玩游戏机的人都是懒鬼。”蕾蕾回答：“也就是说，玩游戏机还拿优秀成绩的陈是个懒鬼。”</a:t>
+              <a:t>一个男孩写道：“所有玩游戏机的人都是懒鬼。”一个女孩回答：“也就是说，玩游戏机还拿优秀成绩的一个同学是个懒鬼。”</a:t>
             </a:r>
           </a:p>
         </p:txBody>
@@ -4795,7 +4795,7 @@
                 </a:solidFill>
                 <a:latin typeface="Nunito Sans"/>
               </a:rPr>
-              <a:t>蕾蕾把伊克尔的想法推到了极端的例子上。这是稻草人吗？</a:t>
+              <a:t>这个女孩把这个男孩的想法推到了极端的例子上。这是稻草人吗？</a:t>
             </a:r>
           </a:p>
           <a:p>
@@ -4820,7 +4820,7 @@
                 </a:solidFill>
                 <a:latin typeface="Nunito Sans"/>
               </a:rPr>
-              <a:t>伊克尔说了什么？“所有”。蕾蕾没有改变他的话。</a:t>
+              <a:t>这个男孩说了什么？“所有”。这个女孩没有改变他的话。</a:t>
             </a:r>
           </a:p>
           <a:p>
@@ -6880,7 +6880,7 @@
                 </a:solidFill>
                 <a:latin typeface="Nunito Sans"/>
               </a:rPr>
-              <a:t>娜亚拉说：“教室里应该禁止手机。”艾托尔回答：“也就是说，你想回到石器时代。”</a:t>
+              <a:t>一个女孩说：“教室里应该禁止手机。”一个男孩回答：“也就是说，你想回到石器时代。”</a:t>
             </a:r>
           </a:p>
         </p:txBody>
@@ -6919,7 +6919,7 @@
                 </a:solidFill>
                 <a:latin typeface="Nunito Sans"/>
               </a:rPr>
-              <a:t>艾托尔理解娜亚拉想说的意思了吗？</a:t>
+              <a:t>这个男孩理解这个女孩想说的意思了吗？</a:t>
             </a:r>
           </a:p>
         </p:txBody>
